--- a/LE3_Architecture_Diagram.pptx
+++ b/LE3_Architecture_Diagram.pptx
@@ -4,12 +4,12 @@
   <p:sldMasterIdLst>
     <p:sldMasterId id="2147483648" r:id="rId1"/>
   </p:sldMasterIdLst>
+  <p:notesMasterIdLst>
+    <p:notesMasterId r:id="rId3"/>
+  </p:notesMasterIdLst>
   <p:sldIdLst>
     <p:sldId id="256" r:id="rId2"/>
   </p:sldIdLst>
-  <p:notesMasterIdLst>
-    <p:notesMasterId r:id="rId3"/>
-  </p:notesMasterIdLst>
   <p:sldSz cx="12192000" cy="6858000"/>
   <p:notesSz cx="6858000" cy="12192000"/>
   <p:defaultTextStyle>
@@ -104,6 +104,11 @@
       </a:defRPr>
     </a:lvl9pPr>
   </p:defaultTextStyle>
+  <p:extLst>
+    <p:ext uri="{EFAFB233-063F-42B5-8137-9DF3F51BA10A}">
+      <p15:sldGuideLst xmlns:p15="http://schemas.microsoft.com/office/powerpoint/2012/main"/>
+    </p:ext>
+  </p:extLst>
 </p:presentation>
 </file>
 
@@ -129,234 +134,10 @@
           <a:chExt cx="0" cy="0"/>
         </a:xfrm>
       </p:grpSpPr>
-      <p:sp>
-        <p:nvSpPr>
-          <p:cNvPr id="2" name="Header Placeholder 1"/>
-          <p:cNvSpPr>
-            <a:spLocks noGrp="1"/>
-          </p:cNvSpPr>
-          <p:nvPr>
-            <p:ph type="hdr" sz="quarter"/>
-          </p:nvPr>
-        </p:nvSpPr>
-        <p:spPr>
-          <a:xfrm>
-            <a:off x="0" y="0"/>
-            <a:ext cx="2971800" cy="458788"/>
-          </a:xfrm>
-          <a:prstGeom prst="rect">
-            <a:avLst/>
-          </a:prstGeom>
-        </p:spPr>
-        <p:txBody>
-          <a:bodyPr vert="horz" lIns="91440" tIns="45720" rIns="91440" bIns="45720" rtlCol="0"/>
-          <a:lstStyle>
-            <a:lvl1pPr algn="l">
-              <a:defRPr sz="1200"/>
-            </a:lvl1pPr>
-          </a:lstStyle>
-          <a:p>
-            <a:endParaRPr lang="en-US"/>
-          </a:p>
-        </p:txBody>
-      </p:sp>
-      <p:sp>
-        <p:nvSpPr>
-          <p:cNvPr id="3" name="Date Placeholder 2"/>
-          <p:cNvSpPr>
-            <a:spLocks noGrp="1"/>
-          </p:cNvSpPr>
-          <p:nvPr>
-            <p:ph type="dt" idx="1"/>
-          </p:nvPr>
-        </p:nvSpPr>
-        <p:spPr>
-          <a:xfrm>
-            <a:off x="3884613" y="0"/>
-            <a:ext cx="2971800" cy="458788"/>
-          </a:xfrm>
-          <a:prstGeom prst="rect">
-            <a:avLst/>
-          </a:prstGeom>
-        </p:spPr>
-        <p:txBody>
-          <a:bodyPr vert="horz" lIns="91440" tIns="45720" rIns="91440" bIns="45720" rtlCol="0"/>
-          <a:lstStyle>
-            <a:lvl1pPr algn="r">
-              <a:defRPr sz="1200"/>
-            </a:lvl1pPr>
-          </a:lstStyle>
-          <a:p>
-            <a:fld id="{5282F153-3F37-0F45-9E97-73ACFA13230C}" type="datetimeFigureOut">
-              <a:rPr lang="en-US"/>
-              <a:t>7/23/19</a:t>
-            </a:fld>
-            <a:endParaRPr lang="en-US"/>
-          </a:p>
-        </p:txBody>
-      </p:sp>
-      <p:sp>
-        <p:nvSpPr>
-          <p:cNvPr id="4" name="Slide Image Placeholder 3"/>
-          <p:cNvSpPr>
-            <a:spLocks noGrp="1" noRot="1" noChangeAspect="1"/>
-          </p:cNvSpPr>
-          <p:nvPr>
-            <p:ph type="sldImg" idx="2"/>
-          </p:nvPr>
-        </p:nvSpPr>
-        <p:spPr>
-          <a:xfrm>
-            <a:off x="685800" y="1143000"/>
-            <a:ext cx="5486400" cy="3086100"/>
-          </a:xfrm>
-          <a:prstGeom prst="rect">
-            <a:avLst/>
-          </a:prstGeom>
-          <a:noFill/>
-          <a:ln w="12700">
-            <a:solidFill>
-              <a:prstClr val="black"/>
-            </a:solidFill>
-          </a:ln>
-        </p:spPr>
-        <p:txBody>
-          <a:bodyPr vert="horz" lIns="91440" tIns="45720" rIns="91440" bIns="45720" rtlCol="0" anchor="ctr"/>
-          <a:lstStyle/>
-          <a:p>
-            <a:endParaRPr lang="en-US"/>
-          </a:p>
-        </p:txBody>
-      </p:sp>
-      <p:sp>
-        <p:nvSpPr>
-          <p:cNvPr id="5" name="Notes Placeholder 4"/>
-          <p:cNvSpPr>
-            <a:spLocks noGrp="1"/>
-          </p:cNvSpPr>
-          <p:nvPr>
-            <p:ph type="body" sz="quarter" idx="3"/>
-          </p:nvPr>
-        </p:nvSpPr>
-        <p:spPr>
-          <a:xfrm>
-            <a:off x="685800" y="4400550"/>
-            <a:ext cx="5486400" cy="3600450"/>
-          </a:xfrm>
-          <a:prstGeom prst="rect">
-            <a:avLst/>
-          </a:prstGeom>
-        </p:spPr>
-        <p:txBody>
-          <a:bodyPr vert="horz" lIns="91440" tIns="45720" rIns="91440" bIns="45720" rtlCol="0"/>
-          <a:lstStyle/>
-          <a:p>
-            <a:pPr lvl="0"/>
-            <a:r>
-              <a:rPr lang="en-US"/>
-              <a:t>Click to edit Master text styles</a:t>
-            </a:r>
-          </a:p>
-          <a:p>
-            <a:pPr lvl="1"/>
-            <a:r>
-              <a:rPr lang="en-US"/>
-              <a:t>Second level</a:t>
-            </a:r>
-          </a:p>
-          <a:p>
-            <a:pPr lvl="2"/>
-            <a:r>
-              <a:rPr lang="en-US"/>
-              <a:t>Third level</a:t>
-            </a:r>
-          </a:p>
-          <a:p>
-            <a:pPr lvl="3"/>
-            <a:r>
-              <a:rPr lang="en-US"/>
-              <a:t>Fourth level</a:t>
-            </a:r>
-          </a:p>
-          <a:p>
-            <a:pPr lvl="4"/>
-            <a:r>
-              <a:rPr lang="en-US"/>
-              <a:t>Fifth level</a:t>
-            </a:r>
-          </a:p>
-        </p:txBody>
-      </p:sp>
-      <p:sp>
-        <p:nvSpPr>
-          <p:cNvPr id="6" name="Footer Placeholder 5"/>
-          <p:cNvSpPr>
-            <a:spLocks noGrp="1"/>
-          </p:cNvSpPr>
-          <p:nvPr>
-            <p:ph type="ftr" sz="quarter" idx="4"/>
-          </p:nvPr>
-        </p:nvSpPr>
-        <p:spPr>
-          <a:xfrm>
-            <a:off x="0" y="8685213"/>
-            <a:ext cx="2971800" cy="458787"/>
-          </a:xfrm>
-          <a:prstGeom prst="rect">
-            <a:avLst/>
-          </a:prstGeom>
-        </p:spPr>
-        <p:txBody>
-          <a:bodyPr vert="horz" lIns="91440" tIns="45720" rIns="91440" bIns="45720" rtlCol="0" anchor="b"/>
-          <a:lstStyle>
-            <a:lvl1pPr algn="l">
-              <a:defRPr sz="1200"/>
-            </a:lvl1pPr>
-          </a:lstStyle>
-          <a:p>
-            <a:endParaRPr lang="en-US"/>
-          </a:p>
-        </p:txBody>
-      </p:sp>
-      <p:sp>
-        <p:nvSpPr>
-          <p:cNvPr id="7" name="Slide Number Placeholder 6"/>
-          <p:cNvSpPr>
-            <a:spLocks noGrp="1"/>
-          </p:cNvSpPr>
-          <p:nvPr>
-            <p:ph type="sldNum" sz="quarter" idx="5"/>
-          </p:nvPr>
-        </p:nvSpPr>
-        <p:spPr>
-          <a:xfrm>
-            <a:off x="3884613" y="8685213"/>
-            <a:ext cx="2971800" cy="458787"/>
-          </a:xfrm>
-          <a:prstGeom prst="rect">
-            <a:avLst/>
-          </a:prstGeom>
-        </p:spPr>
-        <p:txBody>
-          <a:bodyPr vert="horz" lIns="91440" tIns="45720" rIns="91440" bIns="45720" rtlCol="0" anchor="b"/>
-          <a:lstStyle>
-            <a:lvl1pPr algn="r">
-              <a:defRPr sz="1200"/>
-            </a:lvl1pPr>
-          </a:lstStyle>
-          <a:p>
-            <a:fld id="{CE5E9CC1-C706-0F49-92D6-E571CC5EEA8F}" type="slidenum">
-              <a:rPr lang="en-US"/>
-              <a:t>‹#›</a:t>
-            </a:fld>
-            <a:endParaRPr lang="en-US"/>
-          </a:p>
-        </p:txBody>
-      </p:sp>
     </p:spTree>
     <p:extLst>
       <p:ext uri="{BB962C8B-B14F-4D97-AF65-F5344CB8AC3E}">
-        <p14:creationId xmlns:p14="http://schemas.microsoft.com/office/powerpoint/2010/main" val="1024086991"/>
+        <p14:creationId xmlns:p14="http://schemas.microsoft.com/office/powerpoint/2010/main" val="2111689790"/>
       </p:ext>
     </p:extLst>
   </p:cSld>
@@ -500,10 +281,6 @@
           <a:bodyPr/>
           <a:lstStyle/>
           <a:p>
-            <a:r>
-              <a:rPr lang="en-US" dirty="0"/>
-              <a:t/>
-            </a:r>
             <a:endParaRPr lang="en-US" dirty="0"/>
           </a:p>
         </p:txBody>
@@ -577,6 +354,11 @@
 <file path=ppt/slideMasters/slideMaster1.xml><?xml version="1.0" encoding="utf-8"?>
 <p:sldMaster xmlns:a="http://schemas.openxmlformats.org/drawingml/2006/main" xmlns:r="http://schemas.openxmlformats.org/officeDocument/2006/relationships" xmlns:p="http://schemas.openxmlformats.org/presentationml/2006/main">
   <p:cSld>
+    <p:bg>
+      <p:bgRef idx="1001">
+        <a:schemeClr val="bg1"/>
+      </p:bgRef>
+    </p:bg>
     <p:spTree>
       <p:nvGrpSpPr>
         <p:cNvPr id="1" name=""/>
@@ -859,6 +641,7 @@
         <a:solidFill>
           <a:srgbClr val="0F172A"/>
         </a:solidFill>
+        <a:effectLst/>
       </p:bgPr>
     </p:bg>
     <p:spTree>
@@ -896,7 +679,7 @@
           <a:bodyPr wrap="square" lIns="0" tIns="0" rIns="0" bIns="0" rtlCol="0" anchor="ctr"/>
           <a:lstStyle/>
           <a:p>
-            <a:pPr indent="0" marL="0">
+            <a:pPr marL="0" indent="0">
               <a:buNone/>
             </a:pPr>
             <a:r>
@@ -935,7 +718,7 @@
           <a:bodyPr wrap="square" lIns="0" tIns="0" rIns="0" bIns="0" rtlCol="0" anchor="ctr"/>
           <a:lstStyle/>
           <a:p>
-            <a:pPr indent="0" marL="0">
+            <a:pPr marL="0" indent="0">
               <a:buNone/>
             </a:pPr>
             <a:r>
@@ -974,7 +757,7 @@
           <a:bodyPr wrap="square" lIns="0" tIns="0" rIns="0" bIns="0" rtlCol="0" anchor="ctr"/>
           <a:lstStyle/>
           <a:p>
-            <a:pPr algn="ctr" indent="0" marL="0">
+            <a:pPr marL="0" indent="0" algn="ctr">
               <a:buNone/>
             </a:pPr>
             <a:r>
@@ -1013,7 +796,7 @@
           <a:bodyPr wrap="square" lIns="0" tIns="0" rIns="0" bIns="0" rtlCol="0" anchor="ctr"/>
           <a:lstStyle/>
           <a:p>
-            <a:pPr algn="ctr" indent="0" marL="0">
+            <a:pPr marL="0" indent="0" algn="ctr">
               <a:buNone/>
             </a:pPr>
             <a:r>
@@ -1052,7 +835,7 @@
           <a:bodyPr wrap="square" lIns="0" tIns="0" rIns="0" bIns="0" rtlCol="0" anchor="ctr"/>
           <a:lstStyle/>
           <a:p>
-            <a:pPr algn="ctr" indent="0" marL="0">
+            <a:pPr marL="0" indent="0" algn="ctr">
               <a:buNone/>
             </a:pPr>
             <a:r>
@@ -1091,7 +874,7 @@
           <a:bodyPr wrap="square" lIns="0" tIns="0" rIns="0" bIns="0" rtlCol="0" anchor="ctr"/>
           <a:lstStyle/>
           <a:p>
-            <a:pPr algn="ctr" indent="0" marL="0">
+            <a:pPr marL="0" indent="0" algn="ctr">
               <a:buNone/>
             </a:pPr>
             <a:r>
@@ -1133,13 +916,20 @@
             <a:prstDash val="solid"/>
           </a:ln>
           <a:effectLst>
-            <a:outerShdw sx="100000" sy="100000" kx="0" ky="0" algn="bl" rotWithShape="0" blurRad="76200" dist="25400" dir="8100000">
+            <a:outerShdw blurRad="76200" dist="25400" dir="8100000" algn="bl" rotWithShape="0">
               <a:srgbClr val="000000">
                 <a:alpha val="15000"/>
               </a:srgbClr>
             </a:outerShdw>
           </a:effectLst>
         </p:spPr>
+        <p:txBody>
+          <a:bodyPr/>
+          <a:lstStyle/>
+          <a:p>
+            <a:endParaRPr lang="en-US"/>
+          </a:p>
+        </p:txBody>
       </p:sp>
       <p:sp>
         <p:nvSpPr>
@@ -1160,6 +950,13 @@
           </a:solidFill>
           <a:ln/>
         </p:spPr>
+        <p:txBody>
+          <a:bodyPr/>
+          <a:lstStyle/>
+          <a:p>
+            <a:endParaRPr lang="en-US"/>
+          </a:p>
+        </p:txBody>
       </p:sp>
       <p:sp>
         <p:nvSpPr>
@@ -1182,7 +979,7 @@
           <a:bodyPr wrap="square" lIns="0" tIns="0" rIns="0" bIns="0" rtlCol="0" anchor="ctr"/>
           <a:lstStyle/>
           <a:p>
-            <a:pPr algn="ctr" indent="0" marL="0">
+            <a:pPr marL="0" indent="0" algn="ctr">
               <a:buNone/>
             </a:pPr>
             <a:r>
@@ -1202,21 +999,21 @@
       </p:sp>
       <p:pic>
         <p:nvPicPr>
-          <p:cNvPr id="11" name="Image 0" descr="preencoded.png">    </p:cNvPr>
+          <p:cNvPr id="11" name="Image 0" descr="preencoded.png"/>
           <p:cNvPicPr>
             <a:picLocks noChangeAspect="1"/>
           </p:cNvPicPr>
           <p:nvPr/>
         </p:nvPicPr>
         <p:blipFill>
-          <a:blip r:embed="rId1"/>
+          <a:blip r:embed="rId3"/>
           <a:stretch>
             <a:fillRect/>
           </a:stretch>
         </p:blipFill>
         <p:spPr>
           <a:xfrm>
-            <a:off x="1097280" y="2377440"/>
+            <a:off x="1097280" y="2041113"/>
             <a:ext cx="457200" cy="457200"/>
           </a:xfrm>
           <a:prstGeom prst="rect">
@@ -1232,7 +1029,7 @@
         </p:nvSpPr>
         <p:spPr>
           <a:xfrm>
-            <a:off x="457200" y="2926080"/>
+            <a:off x="457200" y="2589753"/>
             <a:ext cx="1737360" cy="457200"/>
           </a:xfrm>
           <a:prstGeom prst="rect">
@@ -1245,7 +1042,7 @@
           <a:bodyPr wrap="square" lIns="0" tIns="0" rIns="0" bIns="0" rtlCol="0" anchor="ctr"/>
           <a:lstStyle/>
           <a:p>
-            <a:pPr algn="ctr" indent="0" marL="0">
+            <a:pPr marL="0" indent="0" algn="ctr">
               <a:buNone/>
             </a:pPr>
             <a:r>
@@ -1262,7 +1059,7 @@
             <a:endParaRPr lang="en-US" sz="1300" dirty="0"/>
           </a:p>
           <a:p>
-            <a:pPr algn="ctr" indent="0" marL="0">
+            <a:pPr marL="0" indent="0" algn="ctr">
               <a:buNone/>
             </a:pPr>
             <a:r>
@@ -1288,7 +1085,7 @@
         </p:nvSpPr>
         <p:spPr>
           <a:xfrm>
-            <a:off x="502920" y="3429000"/>
+            <a:off x="502920" y="3239814"/>
             <a:ext cx="1645920" cy="914400"/>
           </a:xfrm>
           <a:prstGeom prst="rect">
@@ -1301,7 +1098,7 @@
           <a:bodyPr wrap="square" lIns="0" tIns="0" rIns="0" bIns="0" rtlCol="0" anchor="ctr"/>
           <a:lstStyle/>
           <a:p>
-            <a:pPr algn="ctr" indent="0" marL="0">
+            <a:pPr marL="0" indent="0" algn="ctr">
               <a:lnSpc>
                 <a:spcPct val="140000"/>
               </a:lnSpc>
@@ -1310,7 +1107,7 @@
             <a:r>
               <a:rPr lang="en-US" sz="800" dirty="0">
                 <a:solidFill>
-                  <a:srgbClr val="94A3B8"/>
+                  <a:schemeClr val="bg2"/>
                 </a:solidFill>
                 <a:latin typeface="Calibri" pitchFamily="34" charset="0"/>
                 <a:ea typeface="Calibri" pitchFamily="34" charset="-122"/>
@@ -1318,10 +1115,14 @@
               </a:rPr>
               <a:t>D2L import or manual upload.</a:t>
             </a:r>
-            <a:endParaRPr lang="en-US" sz="800" dirty="0"/>
-          </a:p>
-          <a:p>
-            <a:pPr algn="ctr" indent="0" marL="0">
+            <a:endParaRPr lang="en-US" sz="800" dirty="0">
+              <a:solidFill>
+                <a:schemeClr val="bg2"/>
+              </a:solidFill>
+            </a:endParaRPr>
+          </a:p>
+          <a:p>
+            <a:pPr marL="0" indent="0" algn="ctr">
               <a:lnSpc>
                 <a:spcPct val="140000"/>
               </a:lnSpc>
@@ -1330,7 +1131,7 @@
             <a:r>
               <a:rPr lang="en-US" sz="800" dirty="0">
                 <a:solidFill>
-                  <a:srgbClr val="94A3B8"/>
+                  <a:schemeClr val="bg2"/>
                 </a:solidFill>
                 <a:latin typeface="Calibri" pitchFamily="34" charset="0"/>
                 <a:ea typeface="Calibri" pitchFamily="34" charset="-122"/>
@@ -1338,10 +1139,14 @@
               </a:rPr>
               <a:t>Each assignment is auto-tagged</a:t>
             </a:r>
-            <a:endParaRPr lang="en-US" sz="800" dirty="0"/>
-          </a:p>
-          <a:p>
-            <a:pPr algn="ctr" indent="0" marL="0">
+            <a:endParaRPr lang="en-US" sz="800" dirty="0">
+              <a:solidFill>
+                <a:schemeClr val="bg2"/>
+              </a:solidFill>
+            </a:endParaRPr>
+          </a:p>
+          <a:p>
+            <a:pPr marL="0" indent="0" algn="ctr">
               <a:lnSpc>
                 <a:spcPct val="140000"/>
               </a:lnSpc>
@@ -1350,7 +1155,7 @@
             <a:r>
               <a:rPr lang="en-US" sz="800" dirty="0">
                 <a:solidFill>
-                  <a:srgbClr val="94A3B8"/>
+                  <a:schemeClr val="bg2"/>
                 </a:solidFill>
                 <a:latin typeface="Calibri" pitchFamily="34" charset="0"/>
                 <a:ea typeface="Calibri" pitchFamily="34" charset="-122"/>
@@ -1358,10 +1163,14 @@
               </a:rPr>
               <a:t>with 1-3 durable skills by AI.</a:t>
             </a:r>
-            <a:endParaRPr lang="en-US" sz="800" dirty="0"/>
-          </a:p>
-          <a:p>
-            <a:pPr algn="ctr" indent="0" marL="0">
+            <a:endParaRPr lang="en-US" sz="800" dirty="0">
+              <a:solidFill>
+                <a:schemeClr val="bg2"/>
+              </a:solidFill>
+            </a:endParaRPr>
+          </a:p>
+          <a:p>
+            <a:pPr marL="0" indent="0" algn="ctr">
               <a:lnSpc>
                 <a:spcPct val="140000"/>
               </a:lnSpc>
@@ -1370,7 +1179,7 @@
             <a:r>
               <a:rPr lang="en-US" sz="800" dirty="0">
                 <a:solidFill>
-                  <a:srgbClr val="94A3B8"/>
+                  <a:schemeClr val="bg2"/>
                 </a:solidFill>
                 <a:latin typeface="Calibri" pitchFamily="34" charset="0"/>
                 <a:ea typeface="Calibri" pitchFamily="34" charset="-122"/>
@@ -1378,10 +1187,14 @@
               </a:rPr>
               <a:t>Skills with less coverage</a:t>
             </a:r>
-            <a:endParaRPr lang="en-US" sz="800" dirty="0"/>
-          </a:p>
-          <a:p>
-            <a:pPr algn="ctr" indent="0" marL="0">
+            <a:endParaRPr lang="en-US" sz="800" dirty="0">
+              <a:solidFill>
+                <a:schemeClr val="bg2"/>
+              </a:solidFill>
+            </a:endParaRPr>
+          </a:p>
+          <a:p>
+            <a:pPr marL="0" indent="0" algn="ctr">
               <a:lnSpc>
                 <a:spcPct val="140000"/>
               </a:lnSpc>
@@ -1390,7 +1203,7 @@
             <a:r>
               <a:rPr lang="en-US" sz="800" dirty="0">
                 <a:solidFill>
-                  <a:srgbClr val="94A3B8"/>
+                  <a:schemeClr val="bg2"/>
                 </a:solidFill>
                 <a:latin typeface="Calibri" pitchFamily="34" charset="0"/>
                 <a:ea typeface="Calibri" pitchFamily="34" charset="-122"/>
@@ -1398,7 +1211,11 @@
               </a:rPr>
               <a:t>get priority.</a:t>
             </a:r>
-            <a:endParaRPr lang="en-US" sz="800" dirty="0"/>
+            <a:endParaRPr lang="en-US" sz="800" dirty="0">
+              <a:solidFill>
+                <a:schemeClr val="bg2"/>
+              </a:solidFill>
+            </a:endParaRPr>
           </a:p>
         </p:txBody>
       </p:sp>
@@ -1426,13 +1243,20 @@
             <a:prstDash val="solid"/>
           </a:ln>
           <a:effectLst>
-            <a:outerShdw sx="100000" sy="100000" kx="0" ky="0" algn="bl" rotWithShape="0" blurRad="76200" dist="25400" dir="8100000">
+            <a:outerShdw blurRad="76200" dist="25400" dir="8100000" algn="bl" rotWithShape="0">
               <a:srgbClr val="000000">
                 <a:alpha val="15000"/>
               </a:srgbClr>
             </a:outerShdw>
           </a:effectLst>
         </p:spPr>
+        <p:txBody>
+          <a:bodyPr/>
+          <a:lstStyle/>
+          <a:p>
+            <a:endParaRPr lang="en-US"/>
+          </a:p>
+        </p:txBody>
       </p:sp>
       <p:sp>
         <p:nvSpPr>
@@ -1453,6 +1277,13 @@
           </a:solidFill>
           <a:ln/>
         </p:spPr>
+        <p:txBody>
+          <a:bodyPr/>
+          <a:lstStyle/>
+          <a:p>
+            <a:endParaRPr lang="en-US"/>
+          </a:p>
+        </p:txBody>
       </p:sp>
       <p:sp>
         <p:nvSpPr>
@@ -1475,7 +1306,7 @@
           <a:bodyPr wrap="square" lIns="0" tIns="0" rIns="0" bIns="0" rtlCol="0" anchor="ctr"/>
           <a:lstStyle/>
           <a:p>
-            <a:pPr algn="ctr" indent="0" marL="0">
+            <a:pPr marL="0" indent="0" algn="ctr">
               <a:buNone/>
             </a:pPr>
             <a:r>
@@ -1495,21 +1326,21 @@
       </p:sp>
       <p:pic>
         <p:nvPicPr>
-          <p:cNvPr id="17" name="Image 1" descr="preencoded.png">    </p:cNvPr>
+          <p:cNvPr id="17" name="Image 1" descr="preencoded.png"/>
           <p:cNvPicPr>
             <a:picLocks noChangeAspect="1"/>
           </p:cNvPicPr>
           <p:nvPr/>
         </p:nvPicPr>
         <p:blipFill>
-          <a:blip r:embed="rId2"/>
+          <a:blip r:embed="rId4"/>
           <a:stretch>
             <a:fillRect/>
           </a:stretch>
         </p:blipFill>
         <p:spPr>
           <a:xfrm>
-            <a:off x="3337560" y="2377440"/>
+            <a:off x="3337560" y="2041113"/>
             <a:ext cx="457200" cy="457200"/>
           </a:xfrm>
           <a:prstGeom prst="rect">
@@ -1525,7 +1356,7 @@
         </p:nvSpPr>
         <p:spPr>
           <a:xfrm>
-            <a:off x="2697480" y="2926080"/>
+            <a:off x="2697480" y="2589753"/>
             <a:ext cx="1737360" cy="457200"/>
           </a:xfrm>
           <a:prstGeom prst="rect">
@@ -1538,7 +1369,7 @@
           <a:bodyPr wrap="square" lIns="0" tIns="0" rIns="0" bIns="0" rtlCol="0" anchor="ctr"/>
           <a:lstStyle/>
           <a:p>
-            <a:pPr algn="ctr" indent="0" marL="0">
+            <a:pPr marL="0" indent="0" algn="ctr">
               <a:buNone/>
             </a:pPr>
             <a:r>
@@ -1555,7 +1386,7 @@
             <a:endParaRPr lang="en-US" sz="1300" dirty="0"/>
           </a:p>
           <a:p>
-            <a:pPr algn="ctr" indent="0" marL="0">
+            <a:pPr marL="0" indent="0" algn="ctr">
               <a:buNone/>
             </a:pPr>
             <a:r>
@@ -1581,7 +1412,7 @@
         </p:nvSpPr>
         <p:spPr>
           <a:xfrm>
-            <a:off x="2743200" y="3429000"/>
+            <a:off x="2743200" y="3212920"/>
             <a:ext cx="1645920" cy="914400"/>
           </a:xfrm>
           <a:prstGeom prst="rect">
@@ -1594,7 +1425,7 @@
           <a:bodyPr wrap="square" lIns="0" tIns="0" rIns="0" bIns="0" rtlCol="0" anchor="ctr"/>
           <a:lstStyle/>
           <a:p>
-            <a:pPr algn="ctr" indent="0" marL="0">
+            <a:pPr marL="0" indent="0" algn="ctr">
               <a:lnSpc>
                 <a:spcPct val="135000"/>
               </a:lnSpc>
@@ -1603,7 +1434,7 @@
             <a:r>
               <a:rPr lang="en-US" sz="800" dirty="0">
                 <a:solidFill>
-                  <a:srgbClr val="94A3B8"/>
+                  <a:schemeClr val="bg2"/>
                 </a:solidFill>
                 <a:latin typeface="Calibri" pitchFamily="34" charset="0"/>
                 <a:ea typeface="Calibri" pitchFamily="34" charset="-122"/>
@@ -1611,10 +1442,14 @@
               </a:rPr>
               <a:t>3-phase excavation loop:</a:t>
             </a:r>
-            <a:endParaRPr lang="en-US" sz="800" dirty="0"/>
-          </a:p>
-          <a:p>
-            <a:pPr algn="ctr" indent="0" marL="0">
+            <a:endParaRPr lang="en-US" sz="800" dirty="0">
+              <a:solidFill>
+                <a:schemeClr val="bg2"/>
+              </a:solidFill>
+            </a:endParaRPr>
+          </a:p>
+          <a:p>
+            <a:pPr marL="0" indent="0" algn="ctr">
               <a:lnSpc>
                 <a:spcPct val="135000"/>
               </a:lnSpc>
@@ -1623,7 +1458,7 @@
             <a:r>
               <a:rPr lang="en-US" sz="800" dirty="0">
                 <a:solidFill>
-                  <a:srgbClr val="94A3B8"/>
+                  <a:schemeClr val="bg2"/>
                 </a:solidFill>
                 <a:latin typeface="Calibri" pitchFamily="34" charset="0"/>
                 <a:ea typeface="Calibri" pitchFamily="34" charset="-122"/>
@@ -1631,10 +1466,14 @@
               </a:rPr>
               <a:t>What Happened</a:t>
             </a:r>
-            <a:endParaRPr lang="en-US" sz="800" dirty="0"/>
-          </a:p>
-          <a:p>
-            <a:pPr algn="ctr" indent="0" marL="0">
+            <a:endParaRPr lang="en-US" sz="800" dirty="0">
+              <a:solidFill>
+                <a:schemeClr val="bg2"/>
+              </a:solidFill>
+            </a:endParaRPr>
+          </a:p>
+          <a:p>
+            <a:pPr marL="0" indent="0" algn="ctr">
               <a:lnSpc>
                 <a:spcPct val="135000"/>
               </a:lnSpc>
@@ -1643,7 +1482,7 @@
             <a:r>
               <a:rPr lang="en-US" sz="800" dirty="0">
                 <a:solidFill>
-                  <a:srgbClr val="94A3B8"/>
+                  <a:schemeClr val="bg2"/>
                 </a:solidFill>
                 <a:latin typeface="Calibri" pitchFamily="34" charset="0"/>
                 <a:ea typeface="Calibri" pitchFamily="34" charset="-122"/>
@@ -1651,10 +1490,14 @@
               </a:rPr>
               <a:t>What You Did</a:t>
             </a:r>
-            <a:endParaRPr lang="en-US" sz="800" dirty="0"/>
-          </a:p>
-          <a:p>
-            <a:pPr algn="ctr" indent="0" marL="0">
+            <a:endParaRPr lang="en-US" sz="800" dirty="0">
+              <a:solidFill>
+                <a:schemeClr val="bg2"/>
+              </a:solidFill>
+            </a:endParaRPr>
+          </a:p>
+          <a:p>
+            <a:pPr marL="0" indent="0" algn="ctr">
               <a:lnSpc>
                 <a:spcPct val="135000"/>
               </a:lnSpc>
@@ -1663,7 +1506,7 @@
             <a:r>
               <a:rPr lang="en-US" sz="800" dirty="0">
                 <a:solidFill>
-                  <a:srgbClr val="94A3B8"/>
+                  <a:schemeClr val="bg2"/>
                 </a:solidFill>
                 <a:latin typeface="Calibri" pitchFamily="34" charset="0"/>
                 <a:ea typeface="Calibri" pitchFamily="34" charset="-122"/>
@@ -1671,56 +1514,11 @@
               </a:rPr>
               <a:t>What It Means</a:t>
             </a:r>
-            <a:endParaRPr lang="en-US" sz="800" dirty="0"/>
-          </a:p>
-          <a:p>
-            <a:pPr algn="ctr" indent="0" marL="0">
-              <a:lnSpc>
-                <a:spcPct val="135000"/>
-              </a:lnSpc>
-              <a:buNone/>
-            </a:pPr>
-            <a:endParaRPr lang="en-US" sz="800" dirty="0"/>
-          </a:p>
-          <a:p>
-            <a:pPr algn="ctr" indent="0" marL="0">
-              <a:lnSpc>
-                <a:spcPct val="135000"/>
-              </a:lnSpc>
-              <a:buNone/>
-            </a:pPr>
-            <a:r>
-              <a:rPr lang="en-US" sz="800" dirty="0">
-                <a:solidFill>
-                  <a:srgbClr val="94A3B8"/>
-                </a:solidFill>
-                <a:latin typeface="Calibri" pitchFamily="34" charset="0"/>
-                <a:ea typeface="Calibri" pitchFamily="34" charset="-122"/>
-                <a:cs typeface="Calibri" pitchFamily="34" charset="-120"/>
-              </a:rPr>
-              <a:t>Also: open reflections</a:t>
-            </a:r>
-            <a:endParaRPr lang="en-US" sz="800" dirty="0"/>
-          </a:p>
-          <a:p>
-            <a:pPr algn="ctr" indent="0" marL="0">
-              <a:lnSpc>
-                <a:spcPct val="135000"/>
-              </a:lnSpc>
-              <a:buNone/>
-            </a:pPr>
-            <a:r>
-              <a:rPr lang="en-US" sz="800" dirty="0">
-                <a:solidFill>
-                  <a:srgbClr val="94A3B8"/>
-                </a:solidFill>
-                <a:latin typeface="Calibri" pitchFamily="34" charset="0"/>
-                <a:ea typeface="Calibri" pitchFamily="34" charset="-122"/>
-                <a:cs typeface="Calibri" pitchFamily="34" charset="-120"/>
-              </a:rPr>
-              <a:t>(not tied to assignments)</a:t>
-            </a:r>
-            <a:endParaRPr lang="en-US" sz="800" dirty="0"/>
+            <a:endParaRPr lang="en-US" sz="800" dirty="0">
+              <a:solidFill>
+                <a:schemeClr val="bg2"/>
+              </a:solidFill>
+            </a:endParaRPr>
           </a:p>
         </p:txBody>
       </p:sp>
@@ -1748,13 +1546,20 @@
             <a:prstDash val="solid"/>
           </a:ln>
           <a:effectLst>
-            <a:outerShdw sx="100000" sy="100000" kx="0" ky="0" algn="bl" rotWithShape="0" blurRad="76200" dist="25400" dir="8100000">
+            <a:outerShdw blurRad="76200" dist="25400" dir="8100000" algn="bl" rotWithShape="0">
               <a:srgbClr val="000000">
                 <a:alpha val="15000"/>
               </a:srgbClr>
             </a:outerShdw>
           </a:effectLst>
         </p:spPr>
+        <p:txBody>
+          <a:bodyPr/>
+          <a:lstStyle/>
+          <a:p>
+            <a:endParaRPr lang="en-US"/>
+          </a:p>
+        </p:txBody>
       </p:sp>
       <p:sp>
         <p:nvSpPr>
@@ -1775,6 +1580,13 @@
           </a:solidFill>
           <a:ln/>
         </p:spPr>
+        <p:txBody>
+          <a:bodyPr/>
+          <a:lstStyle/>
+          <a:p>
+            <a:endParaRPr lang="en-US"/>
+          </a:p>
+        </p:txBody>
       </p:sp>
       <p:sp>
         <p:nvSpPr>
@@ -1797,7 +1609,7 @@
           <a:bodyPr wrap="square" lIns="0" tIns="0" rIns="0" bIns="0" rtlCol="0" anchor="ctr"/>
           <a:lstStyle/>
           <a:p>
-            <a:pPr algn="ctr" indent="0" marL="0">
+            <a:pPr marL="0" indent="0" algn="ctr">
               <a:buNone/>
             </a:pPr>
             <a:r>
@@ -1817,21 +1629,21 @@
       </p:sp>
       <p:pic>
         <p:nvPicPr>
-          <p:cNvPr id="23" name="Image 2" descr="preencoded.png">    </p:cNvPr>
+          <p:cNvPr id="23" name="Image 2" descr="preencoded.png"/>
           <p:cNvPicPr>
             <a:picLocks noChangeAspect="1"/>
           </p:cNvPicPr>
           <p:nvPr/>
         </p:nvPicPr>
         <p:blipFill>
-          <a:blip r:embed="rId3"/>
+          <a:blip r:embed="rId5"/>
           <a:stretch>
             <a:fillRect/>
           </a:stretch>
         </p:blipFill>
         <p:spPr>
           <a:xfrm>
-            <a:off x="5577840" y="2377440"/>
+            <a:off x="5577840" y="2041113"/>
             <a:ext cx="457200" cy="457200"/>
           </a:xfrm>
           <a:prstGeom prst="rect">
@@ -1847,7 +1659,7 @@
         </p:nvSpPr>
         <p:spPr>
           <a:xfrm>
-            <a:off x="4937760" y="2926080"/>
+            <a:off x="4937760" y="2589753"/>
             <a:ext cx="1737360" cy="457200"/>
           </a:xfrm>
           <a:prstGeom prst="rect">
@@ -1860,7 +1672,7 @@
           <a:bodyPr wrap="square" lIns="0" tIns="0" rIns="0" bIns="0" rtlCol="0" anchor="ctr"/>
           <a:lstStyle/>
           <a:p>
-            <a:pPr algn="ctr" indent="0" marL="0">
+            <a:pPr marL="0" indent="0" algn="ctr">
               <a:buNone/>
             </a:pPr>
             <a:r>
@@ -1877,7 +1689,7 @@
             <a:endParaRPr lang="en-US" sz="1300" dirty="0"/>
           </a:p>
           <a:p>
-            <a:pPr algn="ctr" indent="0" marL="0">
+            <a:pPr marL="0" indent="0" algn="ctr">
               <a:buNone/>
             </a:pPr>
             <a:r>
@@ -1903,7 +1715,7 @@
         </p:nvSpPr>
         <p:spPr>
           <a:xfrm>
-            <a:off x="4983480" y="3429000"/>
+            <a:off x="4983480" y="3239814"/>
             <a:ext cx="1645920" cy="914400"/>
           </a:xfrm>
           <a:prstGeom prst="rect">
@@ -1916,7 +1728,7 @@
           <a:bodyPr wrap="square" lIns="0" tIns="0" rIns="0" bIns="0" rtlCol="0" anchor="ctr"/>
           <a:lstStyle/>
           <a:p>
-            <a:pPr algn="ctr" indent="0" marL="0">
+            <a:pPr marL="0" indent="0" algn="ctr">
               <a:lnSpc>
                 <a:spcPct val="135000"/>
               </a:lnSpc>
@@ -1925,7 +1737,7 @@
             <a:r>
               <a:rPr lang="en-US" sz="800" dirty="0">
                 <a:solidFill>
-                  <a:srgbClr val="94A3B8"/>
+                  <a:schemeClr val="bg2"/>
                 </a:solidFill>
                 <a:latin typeface="Calibri" pitchFamily="34" charset="0"/>
                 <a:ea typeface="Calibri" pitchFamily="34" charset="-122"/>
@@ -1933,10 +1745,14 @@
               </a:rPr>
               <a:t>Each conversation produces:</a:t>
             </a:r>
-            <a:endParaRPr lang="en-US" sz="800" dirty="0"/>
-          </a:p>
-          <a:p>
-            <a:pPr algn="ctr" indent="0" marL="0">
+            <a:endParaRPr lang="en-US" sz="800" dirty="0">
+              <a:solidFill>
+                <a:schemeClr val="bg2"/>
+              </a:solidFill>
+            </a:endParaRPr>
+          </a:p>
+          <a:p>
+            <a:pPr marL="0" indent="0" algn="ctr">
               <a:lnSpc>
                 <a:spcPct val="135000"/>
               </a:lnSpc>
@@ -1945,7 +1761,7 @@
             <a:r>
               <a:rPr lang="en-US" sz="800" dirty="0">
                 <a:solidFill>
-                  <a:srgbClr val="94A3B8"/>
+                  <a:schemeClr val="bg2"/>
                 </a:solidFill>
                 <a:latin typeface="Calibri" pitchFamily="34" charset="0"/>
                 <a:ea typeface="Calibri" pitchFamily="34" charset="-122"/>
@@ -1953,10 +1769,14 @@
               </a:rPr>
               <a:t>• Synthesis (student-facing)</a:t>
             </a:r>
-            <a:endParaRPr lang="en-US" sz="800" dirty="0"/>
-          </a:p>
-          <a:p>
-            <a:pPr algn="ctr" indent="0" marL="0">
+            <a:endParaRPr lang="en-US" sz="800" dirty="0">
+              <a:solidFill>
+                <a:schemeClr val="bg2"/>
+              </a:solidFill>
+            </a:endParaRPr>
+          </a:p>
+          <a:p>
+            <a:pPr marL="0" indent="0" algn="ctr">
               <a:lnSpc>
                 <a:spcPct val="135000"/>
               </a:lnSpc>
@@ -1965,7 +1785,7 @@
             <a:r>
               <a:rPr lang="en-US" sz="800" dirty="0">
                 <a:solidFill>
-                  <a:srgbClr val="94A3B8"/>
+                  <a:schemeClr val="bg2"/>
                 </a:solidFill>
                 <a:latin typeface="Calibri" pitchFamily="34" charset="0"/>
                 <a:ea typeface="Calibri" pitchFamily="34" charset="-122"/>
@@ -1973,10 +1793,14 @@
               </a:rPr>
               <a:t>• SDT level signals</a:t>
             </a:r>
-            <a:endParaRPr lang="en-US" sz="800" dirty="0"/>
-          </a:p>
-          <a:p>
-            <a:pPr algn="ctr" indent="0" marL="0">
+            <a:endParaRPr lang="en-US" sz="800" dirty="0">
+              <a:solidFill>
+                <a:schemeClr val="bg2"/>
+              </a:solidFill>
+            </a:endParaRPr>
+          </a:p>
+          <a:p>
+            <a:pPr marL="0" indent="0" algn="ctr">
               <a:lnSpc>
                 <a:spcPct val="135000"/>
               </a:lnSpc>
@@ -1985,7 +1809,7 @@
             <a:r>
               <a:rPr lang="en-US" sz="800" dirty="0">
                 <a:solidFill>
-                  <a:srgbClr val="94A3B8"/>
+                  <a:schemeClr val="bg2"/>
                 </a:solidFill>
                 <a:latin typeface="Calibri" pitchFamily="34" charset="0"/>
                 <a:ea typeface="Calibri" pitchFamily="34" charset="-122"/>
@@ -1993,10 +1817,14 @@
               </a:rPr>
               <a:t>• Behavioral indicators</a:t>
             </a:r>
-            <a:endParaRPr lang="en-US" sz="800" dirty="0"/>
-          </a:p>
-          <a:p>
-            <a:pPr algn="ctr" indent="0" marL="0">
+            <a:endParaRPr lang="en-US" sz="800" dirty="0">
+              <a:solidFill>
+                <a:schemeClr val="bg2"/>
+              </a:solidFill>
+            </a:endParaRPr>
+          </a:p>
+          <a:p>
+            <a:pPr marL="0" indent="0" algn="ctr">
               <a:lnSpc>
                 <a:spcPct val="135000"/>
               </a:lnSpc>
@@ -2005,7 +1833,7 @@
             <a:r>
               <a:rPr lang="en-US" sz="800" dirty="0">
                 <a:solidFill>
-                  <a:srgbClr val="94A3B8"/>
+                  <a:schemeClr val="bg2"/>
                 </a:solidFill>
                 <a:latin typeface="Calibri" pitchFamily="34" charset="0"/>
                 <a:ea typeface="Calibri" pitchFamily="34" charset="-122"/>
@@ -2013,10 +1841,14 @@
               </a:rPr>
               <a:t>• Key quotes &amp; moments</a:t>
             </a:r>
-            <a:endParaRPr lang="en-US" sz="800" dirty="0"/>
-          </a:p>
-          <a:p>
-            <a:pPr algn="ctr" indent="0" marL="0">
+            <a:endParaRPr lang="en-US" sz="800" dirty="0">
+              <a:solidFill>
+                <a:schemeClr val="bg2"/>
+              </a:solidFill>
+            </a:endParaRPr>
+          </a:p>
+          <a:p>
+            <a:pPr marL="0" indent="0" algn="ctr">
               <a:lnSpc>
                 <a:spcPct val="135000"/>
               </a:lnSpc>
@@ -2025,18 +1857,22 @@
             <a:r>
               <a:rPr lang="en-US" sz="800" dirty="0">
                 <a:solidFill>
-                  <a:srgbClr val="94A3B8"/>
-                </a:solidFill>
-                <a:latin typeface="Calibri" pitchFamily="34" charset="0"/>
-                <a:ea typeface="Calibri" pitchFamily="34" charset="-122"/>
-                <a:cs typeface="Calibri" pitchFamily="34" charset="-120"/>
-              </a:rPr>
-              <a:t>• Voice fingerprint</a:t>
-            </a:r>
-            <a:endParaRPr lang="en-US" sz="800" dirty="0"/>
-          </a:p>
-          <a:p>
-            <a:pPr algn="ctr" indent="0" marL="0">
+                  <a:schemeClr val="bg2"/>
+                </a:solidFill>
+                <a:latin typeface="Calibri" pitchFamily="34" charset="0"/>
+                <a:ea typeface="Calibri" pitchFamily="34" charset="-122"/>
+                <a:cs typeface="Calibri" pitchFamily="34" charset="-120"/>
+              </a:rPr>
+              <a:t>• Student Voice &amp; Tone</a:t>
+            </a:r>
+            <a:endParaRPr lang="en-US" sz="800" dirty="0">
+              <a:solidFill>
+                <a:schemeClr val="bg2"/>
+              </a:solidFill>
+            </a:endParaRPr>
+          </a:p>
+          <a:p>
+            <a:pPr marL="0" indent="0" algn="ctr">
               <a:lnSpc>
                 <a:spcPct val="135000"/>
               </a:lnSpc>
@@ -2045,7 +1881,7 @@
             <a:r>
               <a:rPr lang="en-US" sz="800" dirty="0">
                 <a:solidFill>
-                  <a:srgbClr val="94A3B8"/>
+                  <a:schemeClr val="bg2"/>
                 </a:solidFill>
                 <a:latin typeface="Calibri" pitchFamily="34" charset="0"/>
                 <a:ea typeface="Calibri" pitchFamily="34" charset="-122"/>
@@ -2053,7 +1889,11 @@
               </a:rPr>
               <a:t>• Growth trajectory</a:t>
             </a:r>
-            <a:endParaRPr lang="en-US" sz="800" dirty="0"/>
+            <a:endParaRPr lang="en-US" sz="800" dirty="0">
+              <a:solidFill>
+                <a:schemeClr val="bg2"/>
+              </a:solidFill>
+            </a:endParaRPr>
           </a:p>
         </p:txBody>
       </p:sp>
@@ -2081,13 +1921,20 @@
             <a:prstDash val="solid"/>
           </a:ln>
           <a:effectLst>
-            <a:outerShdw sx="100000" sy="100000" kx="0" ky="0" algn="bl" rotWithShape="0" blurRad="76200" dist="25400" dir="8100000">
+            <a:outerShdw blurRad="76200" dist="25400" dir="8100000" algn="bl" rotWithShape="0">
               <a:srgbClr val="000000">
                 <a:alpha val="15000"/>
               </a:srgbClr>
             </a:outerShdw>
           </a:effectLst>
         </p:spPr>
+        <p:txBody>
+          <a:bodyPr/>
+          <a:lstStyle/>
+          <a:p>
+            <a:endParaRPr lang="en-US"/>
+          </a:p>
+        </p:txBody>
       </p:sp>
       <p:sp>
         <p:nvSpPr>
@@ -2108,6 +1955,13 @@
           </a:solidFill>
           <a:ln/>
         </p:spPr>
+        <p:txBody>
+          <a:bodyPr/>
+          <a:lstStyle/>
+          <a:p>
+            <a:endParaRPr lang="en-US"/>
+          </a:p>
+        </p:txBody>
       </p:sp>
       <p:sp>
         <p:nvSpPr>
@@ -2130,7 +1984,7 @@
           <a:bodyPr wrap="square" lIns="0" tIns="0" rIns="0" bIns="0" rtlCol="0" anchor="ctr"/>
           <a:lstStyle/>
           <a:p>
-            <a:pPr algn="ctr" indent="0" marL="0">
+            <a:pPr marL="0" indent="0" algn="ctr">
               <a:buNone/>
             </a:pPr>
             <a:r>
@@ -2150,21 +2004,21 @@
       </p:sp>
       <p:pic>
         <p:nvPicPr>
-          <p:cNvPr id="29" name="Image 3" descr="preencoded.png">    </p:cNvPr>
+          <p:cNvPr id="29" name="Image 3" descr="preencoded.png"/>
           <p:cNvPicPr>
             <a:picLocks noChangeAspect="1"/>
           </p:cNvPicPr>
           <p:nvPr/>
         </p:nvPicPr>
         <p:blipFill>
-          <a:blip r:embed="rId4"/>
+          <a:blip r:embed="rId6"/>
           <a:stretch>
             <a:fillRect/>
           </a:stretch>
         </p:blipFill>
         <p:spPr>
           <a:xfrm>
-            <a:off x="7818120" y="2377440"/>
+            <a:off x="7818120" y="2041113"/>
             <a:ext cx="457200" cy="457200"/>
           </a:xfrm>
           <a:prstGeom prst="rect">
@@ -2180,7 +2034,7 @@
         </p:nvSpPr>
         <p:spPr>
           <a:xfrm>
-            <a:off x="7178040" y="2926080"/>
+            <a:off x="7178040" y="2589753"/>
             <a:ext cx="1737360" cy="457200"/>
           </a:xfrm>
           <a:prstGeom prst="rect">
@@ -2193,7 +2047,7 @@
           <a:bodyPr wrap="square" lIns="0" tIns="0" rIns="0" bIns="0" rtlCol="0" anchor="ctr"/>
           <a:lstStyle/>
           <a:p>
-            <a:pPr algn="ctr" indent="0" marL="0">
+            <a:pPr marL="0" indent="0" algn="ctr">
               <a:buNone/>
             </a:pPr>
             <a:r>
@@ -2210,7 +2064,7 @@
             <a:endParaRPr lang="en-US" sz="1300" dirty="0"/>
           </a:p>
           <a:p>
-            <a:pPr algn="ctr" indent="0" marL="0">
+            <a:pPr marL="0" indent="0" algn="ctr">
               <a:buNone/>
             </a:pPr>
             <a:r>
@@ -2236,7 +2090,7 @@
         </p:nvSpPr>
         <p:spPr>
           <a:xfrm>
-            <a:off x="7223760" y="3429000"/>
+            <a:off x="7223760" y="3239814"/>
             <a:ext cx="1645920" cy="914400"/>
           </a:xfrm>
           <a:prstGeom prst="rect">
@@ -2249,7 +2103,7 @@
           <a:bodyPr wrap="square" lIns="0" tIns="0" rIns="0" bIns="0" rtlCol="0" anchor="ctr"/>
           <a:lstStyle/>
           <a:p>
-            <a:pPr algn="ctr" indent="0" marL="0">
+            <a:pPr marL="0" indent="0" algn="ctr">
               <a:lnSpc>
                 <a:spcPct val="135000"/>
               </a:lnSpc>
@@ -2258,7 +2112,7 @@
             <a:r>
               <a:rPr lang="en-US" sz="800" dirty="0">
                 <a:solidFill>
-                  <a:srgbClr val="94A3B8"/>
+                  <a:schemeClr val="bg2"/>
                 </a:solidFill>
                 <a:latin typeface="Calibri" pitchFamily="34" charset="0"/>
                 <a:ea typeface="Calibri" pitchFamily="34" charset="-122"/>
@@ -2266,10 +2120,14 @@
               </a:rPr>
               <a:t>12 per-student narratives.</a:t>
             </a:r>
-            <a:endParaRPr lang="en-US" sz="800" dirty="0"/>
-          </a:p>
-          <a:p>
-            <a:pPr algn="ctr" indent="0" marL="0">
+            <a:endParaRPr lang="en-US" sz="800" dirty="0">
+              <a:solidFill>
+                <a:schemeClr val="bg2"/>
+              </a:solidFill>
+            </a:endParaRPr>
+          </a:p>
+          <a:p>
+            <a:pPr marL="0" indent="0" algn="ctr">
               <a:lnSpc>
                 <a:spcPct val="135000"/>
               </a:lnSpc>
@@ -2278,7 +2136,7 @@
             <a:r>
               <a:rPr lang="en-US" sz="800" dirty="0">
                 <a:solidFill>
-                  <a:srgbClr val="94A3B8"/>
+                  <a:schemeClr val="bg2"/>
                 </a:solidFill>
                 <a:latin typeface="Calibri" pitchFamily="34" charset="0"/>
                 <a:ea typeface="Calibri" pitchFamily="34" charset="-122"/>
@@ -2286,10 +2144,14 @@
               </a:rPr>
               <a:t>Built from conversations,</a:t>
             </a:r>
-            <a:endParaRPr lang="en-US" sz="800" dirty="0"/>
-          </a:p>
-          <a:p>
-            <a:pPr algn="ctr" indent="0" marL="0">
+            <a:endParaRPr lang="en-US" sz="800" dirty="0">
+              <a:solidFill>
+                <a:schemeClr val="bg2"/>
+              </a:solidFill>
+            </a:endParaRPr>
+          </a:p>
+          <a:p>
+            <a:pPr marL="0" indent="0" algn="ctr">
               <a:lnSpc>
                 <a:spcPct val="135000"/>
               </a:lnSpc>
@@ -2298,7 +2160,7 @@
             <a:r>
               <a:rPr lang="en-US" sz="800" dirty="0">
                 <a:solidFill>
-                  <a:srgbClr val="94A3B8"/>
+                  <a:schemeClr val="bg2"/>
                 </a:solidFill>
                 <a:latin typeface="Calibri" pitchFamily="34" charset="0"/>
                 <a:ea typeface="Calibri" pitchFamily="34" charset="-122"/>
@@ -2306,10 +2168,14 @@
               </a:rPr>
               <a:t>definitions, C2A analysis,</a:t>
             </a:r>
-            <a:endParaRPr lang="en-US" sz="800" dirty="0"/>
-          </a:p>
-          <a:p>
-            <a:pPr algn="ctr" indent="0" marL="0">
+            <a:endParaRPr lang="en-US" sz="800" dirty="0">
+              <a:solidFill>
+                <a:schemeClr val="bg2"/>
+              </a:solidFill>
+            </a:endParaRPr>
+          </a:p>
+          <a:p>
+            <a:pPr marL="0" indent="0" algn="ctr">
               <a:lnSpc>
                 <a:spcPct val="135000"/>
               </a:lnSpc>
@@ -2318,7 +2184,7 @@
             <a:r>
               <a:rPr lang="en-US" sz="800" dirty="0">
                 <a:solidFill>
-                  <a:srgbClr val="94A3B8"/>
+                  <a:schemeClr val="bg2"/>
                 </a:solidFill>
                 <a:latin typeface="Calibri" pitchFamily="34" charset="0"/>
                 <a:ea typeface="Calibri" pitchFamily="34" charset="-122"/>
@@ -2326,56 +2192,11 @@
               </a:rPr>
               <a:t>and voice fingerprints.</a:t>
             </a:r>
-            <a:endParaRPr lang="en-US" sz="800" dirty="0"/>
-          </a:p>
-          <a:p>
-            <a:pPr algn="ctr" indent="0" marL="0">
-              <a:lnSpc>
-                <a:spcPct val="135000"/>
-              </a:lnSpc>
-              <a:buNone/>
-            </a:pPr>
-            <a:endParaRPr lang="en-US" sz="800" dirty="0"/>
-          </a:p>
-          <a:p>
-            <a:pPr algn="ctr" indent="0" marL="0">
-              <a:lnSpc>
-                <a:spcPct val="135000"/>
-              </a:lnSpc>
-              <a:buNone/>
-            </a:pPr>
-            <a:r>
-              <a:rPr lang="en-US" sz="800" dirty="0">
-                <a:solidFill>
-                  <a:srgbClr val="94A3B8"/>
-                </a:solidFill>
-                <a:latin typeface="Calibri" pitchFamily="34" charset="0"/>
-                <a:ea typeface="Calibri" pitchFamily="34" charset="-122"/>
-                <a:cs typeface="Calibri" pitchFamily="34" charset="-120"/>
-              </a:rPr>
-              <a:t>Written to sound like the</a:t>
-            </a:r>
-            <a:endParaRPr lang="en-US" sz="800" dirty="0"/>
-          </a:p>
-          <a:p>
-            <a:pPr algn="ctr" indent="0" marL="0">
-              <a:lnSpc>
-                <a:spcPct val="135000"/>
-              </a:lnSpc>
-              <a:buNone/>
-            </a:pPr>
-            <a:r>
-              <a:rPr lang="en-US" sz="800" dirty="0">
-                <a:solidFill>
-                  <a:srgbClr val="94A3B8"/>
-                </a:solidFill>
-                <a:latin typeface="Calibri" pitchFamily="34" charset="0"/>
-                <a:ea typeface="Calibri" pitchFamily="34" charset="-122"/>
-                <a:cs typeface="Calibri" pitchFamily="34" charset="-120"/>
-              </a:rPr>
-              <a:t>student, not about them.</a:t>
-            </a:r>
-            <a:endParaRPr lang="en-US" sz="800" dirty="0"/>
+            <a:endParaRPr lang="en-US" sz="800" dirty="0">
+              <a:solidFill>
+                <a:schemeClr val="bg2"/>
+              </a:solidFill>
+            </a:endParaRPr>
           </a:p>
         </p:txBody>
       </p:sp>
@@ -2403,13 +2224,20 @@
             <a:prstDash val="solid"/>
           </a:ln>
           <a:effectLst>
-            <a:outerShdw sx="100000" sy="100000" kx="0" ky="0" algn="bl" rotWithShape="0" blurRad="76200" dist="25400" dir="8100000">
+            <a:outerShdw blurRad="76200" dist="25400" dir="8100000" algn="bl" rotWithShape="0">
               <a:srgbClr val="000000">
                 <a:alpha val="15000"/>
               </a:srgbClr>
             </a:outerShdw>
           </a:effectLst>
         </p:spPr>
+        <p:txBody>
+          <a:bodyPr/>
+          <a:lstStyle/>
+          <a:p>
+            <a:endParaRPr lang="en-US"/>
+          </a:p>
+        </p:txBody>
       </p:sp>
       <p:sp>
         <p:nvSpPr>
@@ -2430,6 +2258,13 @@
           </a:solidFill>
           <a:ln/>
         </p:spPr>
+        <p:txBody>
+          <a:bodyPr/>
+          <a:lstStyle/>
+          <a:p>
+            <a:endParaRPr lang="en-US"/>
+          </a:p>
+        </p:txBody>
       </p:sp>
       <p:sp>
         <p:nvSpPr>
@@ -2452,7 +2287,7 @@
           <a:bodyPr wrap="square" lIns="0" tIns="0" rIns="0" bIns="0" rtlCol="0" anchor="ctr"/>
           <a:lstStyle/>
           <a:p>
-            <a:pPr algn="ctr" indent="0" marL="0">
+            <a:pPr marL="0" indent="0" algn="ctr">
               <a:buNone/>
             </a:pPr>
             <a:r>
@@ -2472,21 +2307,21 @@
       </p:sp>
       <p:pic>
         <p:nvPicPr>
-          <p:cNvPr id="35" name="Image 4" descr="preencoded.png">    </p:cNvPr>
+          <p:cNvPr id="35" name="Image 4" descr="preencoded.png"/>
           <p:cNvPicPr>
             <a:picLocks noChangeAspect="1"/>
           </p:cNvPicPr>
           <p:nvPr/>
         </p:nvPicPr>
         <p:blipFill>
-          <a:blip r:embed="rId5"/>
+          <a:blip r:embed="rId7"/>
           <a:stretch>
             <a:fillRect/>
           </a:stretch>
         </p:blipFill>
         <p:spPr>
           <a:xfrm>
-            <a:off x="10058400" y="2377440"/>
+            <a:off x="10058400" y="2041113"/>
             <a:ext cx="457200" cy="457200"/>
           </a:xfrm>
           <a:prstGeom prst="rect">
@@ -2502,7 +2337,7 @@
         </p:nvSpPr>
         <p:spPr>
           <a:xfrm>
-            <a:off x="9418320" y="2926080"/>
+            <a:off x="9418320" y="2589753"/>
             <a:ext cx="1737360" cy="457200"/>
           </a:xfrm>
           <a:prstGeom prst="rect">
@@ -2515,7 +2350,7 @@
           <a:bodyPr wrap="square" lIns="0" tIns="0" rIns="0" bIns="0" rtlCol="0" anchor="ctr"/>
           <a:lstStyle/>
           <a:p>
-            <a:pPr algn="ctr" indent="0" marL="0">
+            <a:pPr marL="0" indent="0" algn="ctr">
               <a:buNone/>
             </a:pPr>
             <a:r>
@@ -2532,7 +2367,7 @@
             <a:endParaRPr lang="en-US" sz="1300" dirty="0"/>
           </a:p>
           <a:p>
-            <a:pPr algn="ctr" indent="0" marL="0">
+            <a:pPr marL="0" indent="0" algn="ctr">
               <a:buNone/>
             </a:pPr>
             <a:r>
@@ -2558,7 +2393,7 @@
         </p:nvSpPr>
         <p:spPr>
           <a:xfrm>
-            <a:off x="9464040" y="3429000"/>
+            <a:off x="9464040" y="3239814"/>
             <a:ext cx="1645920" cy="914400"/>
           </a:xfrm>
           <a:prstGeom prst="rect">
@@ -2571,7 +2406,7 @@
           <a:bodyPr wrap="square" lIns="0" tIns="0" rIns="0" bIns="0" rtlCol="0" anchor="ctr"/>
           <a:lstStyle/>
           <a:p>
-            <a:pPr algn="ctr" indent="0" marL="0">
+            <a:pPr marL="0" indent="0" algn="ctr">
               <a:lnSpc>
                 <a:spcPct val="135000"/>
               </a:lnSpc>
@@ -2580,7 +2415,7 @@
             <a:r>
               <a:rPr lang="en-US" sz="800" dirty="0">
                 <a:solidFill>
-                  <a:srgbClr val="94A3B8"/>
+                  <a:schemeClr val="bg2"/>
                 </a:solidFill>
                 <a:latin typeface="Calibri" pitchFamily="34" charset="0"/>
                 <a:ea typeface="Calibri" pitchFamily="34" charset="-122"/>
@@ -2588,10 +2423,14 @@
               </a:rPr>
               <a:t>All 12 narratives synthesized</a:t>
             </a:r>
-            <a:endParaRPr lang="en-US" sz="800" dirty="0"/>
-          </a:p>
-          <a:p>
-            <a:pPr algn="ctr" indent="0" marL="0">
+            <a:endParaRPr lang="en-US" sz="800" dirty="0">
+              <a:solidFill>
+                <a:schemeClr val="bg2"/>
+              </a:solidFill>
+            </a:endParaRPr>
+          </a:p>
+          <a:p>
+            <a:pPr marL="0" indent="0" algn="ctr">
               <a:lnSpc>
                 <a:spcPct val="135000"/>
               </a:lnSpc>
@@ -2600,7 +2439,7 @@
             <a:r>
               <a:rPr lang="en-US" sz="800" dirty="0">
                 <a:solidFill>
-                  <a:srgbClr val="94A3B8"/>
+                  <a:schemeClr val="bg2"/>
                 </a:solidFill>
                 <a:latin typeface="Calibri" pitchFamily="34" charset="0"/>
                 <a:ea typeface="Calibri" pitchFamily="34" charset="-122"/>
@@ -2608,19 +2447,27 @@
               </a:rPr>
               <a:t>into actionable language:</a:t>
             </a:r>
-            <a:endParaRPr lang="en-US" sz="800" dirty="0"/>
-          </a:p>
-          <a:p>
-            <a:pPr algn="ctr" indent="0" marL="0">
+            <a:endParaRPr lang="en-US" sz="800" dirty="0">
+              <a:solidFill>
+                <a:schemeClr val="bg2"/>
+              </a:solidFill>
+            </a:endParaRPr>
+          </a:p>
+          <a:p>
+            <a:pPr marL="0" indent="0" algn="ctr">
               <a:lnSpc>
                 <a:spcPct val="135000"/>
               </a:lnSpc>
               <a:buNone/>
             </a:pPr>
-            <a:endParaRPr lang="en-US" sz="800" dirty="0"/>
-          </a:p>
-          <a:p>
-            <a:pPr algn="ctr" indent="0" marL="0">
+            <a:endParaRPr lang="en-US" sz="800" dirty="0">
+              <a:solidFill>
+                <a:schemeClr val="bg2"/>
+              </a:solidFill>
+            </a:endParaRPr>
+          </a:p>
+          <a:p>
+            <a:pPr marL="0" indent="0" algn="ctr">
               <a:lnSpc>
                 <a:spcPct val="135000"/>
               </a:lnSpc>
@@ -2629,7 +2476,7 @@
             <a:r>
               <a:rPr lang="en-US" sz="800" dirty="0">
                 <a:solidFill>
-                  <a:srgbClr val="94A3B8"/>
+                  <a:schemeClr val="bg2"/>
                 </a:solidFill>
                 <a:latin typeface="Calibri" pitchFamily="34" charset="0"/>
                 <a:ea typeface="Calibri" pitchFamily="34" charset="-122"/>
@@ -2637,10 +2484,14 @@
               </a:rPr>
               <a:t>• Professional summary</a:t>
             </a:r>
-            <a:endParaRPr lang="en-US" sz="800" dirty="0"/>
-          </a:p>
-          <a:p>
-            <a:pPr algn="ctr" indent="0" marL="0">
+            <a:endParaRPr lang="en-US" sz="800" dirty="0">
+              <a:solidFill>
+                <a:schemeClr val="bg2"/>
+              </a:solidFill>
+            </a:endParaRPr>
+          </a:p>
+          <a:p>
+            <a:pPr marL="0" indent="0" algn="ctr">
               <a:lnSpc>
                 <a:spcPct val="135000"/>
               </a:lnSpc>
@@ -2649,7 +2500,7 @@
             <a:r>
               <a:rPr lang="en-US" sz="800" dirty="0">
                 <a:solidFill>
-                  <a:srgbClr val="94A3B8"/>
+                  <a:schemeClr val="bg2"/>
                 </a:solidFill>
                 <a:latin typeface="Calibri" pitchFamily="34" charset="0"/>
                 <a:ea typeface="Calibri" pitchFamily="34" charset="-122"/>
@@ -2657,10 +2508,14 @@
               </a:rPr>
               <a:t>• Resume skill descriptions</a:t>
             </a:r>
-            <a:endParaRPr lang="en-US" sz="800" dirty="0"/>
-          </a:p>
-          <a:p>
-            <a:pPr algn="ctr" indent="0" marL="0">
+            <a:endParaRPr lang="en-US" sz="800" dirty="0">
+              <a:solidFill>
+                <a:schemeClr val="bg2"/>
+              </a:solidFill>
+            </a:endParaRPr>
+          </a:p>
+          <a:p>
+            <a:pPr marL="0" indent="0" algn="ctr">
               <a:lnSpc>
                 <a:spcPct val="135000"/>
               </a:lnSpc>
@@ -2669,7 +2524,7 @@
             <a:r>
               <a:rPr lang="en-US" sz="800" dirty="0">
                 <a:solidFill>
-                  <a:srgbClr val="94A3B8"/>
+                  <a:schemeClr val="bg2"/>
                 </a:solidFill>
                 <a:latin typeface="Calibri" pitchFamily="34" charset="0"/>
                 <a:ea typeface="Calibri" pitchFamily="34" charset="-122"/>
@@ -2677,7 +2532,11 @@
               </a:rPr>
               <a:t>• Interview talking points</a:t>
             </a:r>
-            <a:endParaRPr lang="en-US" sz="800" dirty="0"/>
+            <a:endParaRPr lang="en-US" sz="800" dirty="0">
+              <a:solidFill>
+                <a:schemeClr val="bg2"/>
+              </a:solidFill>
+            </a:endParaRPr>
           </a:p>
         </p:txBody>
       </p:sp>
@@ -2705,17 +2564,24 @@
             <a:prstDash val="dash"/>
           </a:ln>
         </p:spPr>
+        <p:txBody>
+          <a:bodyPr/>
+          <a:lstStyle/>
+          <a:p>
+            <a:endParaRPr lang="en-US"/>
+          </a:p>
+        </p:txBody>
       </p:sp>
       <p:pic>
         <p:nvPicPr>
-          <p:cNvPr id="39" name="Image 5" descr="preencoded.png">    </p:cNvPr>
+          <p:cNvPr id="39" name="Image 5" descr="preencoded.png"/>
           <p:cNvPicPr>
             <a:picLocks noChangeAspect="1"/>
           </p:cNvPicPr>
           <p:nvPr/>
         </p:nvPicPr>
         <p:blipFill>
-          <a:blip r:embed="rId6"/>
+          <a:blip r:embed="rId8"/>
           <a:stretch>
             <a:fillRect/>
           </a:stretch>
@@ -2751,7 +2617,7 @@
           <a:bodyPr wrap="square" lIns="0" tIns="0" rIns="0" bIns="0" rtlCol="0" anchor="ctr"/>
           <a:lstStyle/>
           <a:p>
-            <a:pPr indent="0" marL="0">
+            <a:pPr marL="0" indent="0">
               <a:buNone/>
             </a:pPr>
             <a:r>
@@ -2790,7 +2656,7 @@
           <a:bodyPr wrap="square" lIns="0" tIns="0" rIns="0" bIns="0" rtlCol="0" anchor="ctr"/>
           <a:lstStyle/>
           <a:p>
-            <a:pPr indent="0" marL="0">
+            <a:pPr marL="0" indent="0">
               <a:buNone/>
             </a:pPr>
             <a:r>
@@ -2829,7 +2695,7 @@
           <a:bodyPr wrap="square" lIns="0" tIns="0" rIns="0" bIns="0" rtlCol="0" anchor="ctr"/>
           <a:lstStyle/>
           <a:p>
-            <a:pPr algn="ctr" indent="0" marL="0">
+            <a:pPr marL="0" indent="0" algn="ctr">
               <a:buNone/>
             </a:pPr>
             <a:r>
@@ -2868,17 +2734,24 @@
             <a:prstDash val="solid"/>
           </a:ln>
         </p:spPr>
+        <p:txBody>
+          <a:bodyPr/>
+          <a:lstStyle/>
+          <a:p>
+            <a:endParaRPr lang="en-US"/>
+          </a:p>
+        </p:txBody>
       </p:sp>
       <p:pic>
         <p:nvPicPr>
-          <p:cNvPr id="44" name="Image 6" descr="preencoded.png">    </p:cNvPr>
+          <p:cNvPr id="44" name="Image 6" descr="preencoded.png"/>
           <p:cNvPicPr>
             <a:picLocks noChangeAspect="1"/>
           </p:cNvPicPr>
           <p:nvPr/>
         </p:nvPicPr>
         <p:blipFill>
-          <a:blip r:embed="rId7"/>
+          <a:blip r:embed="rId9"/>
           <a:stretch>
             <a:fillRect/>
           </a:stretch>
@@ -2895,14 +2768,14 @@
       </p:pic>
       <p:pic>
         <p:nvPicPr>
-          <p:cNvPr id="45" name="Image 7" descr="preencoded.png">    </p:cNvPr>
+          <p:cNvPr id="45" name="Image 7" descr="preencoded.png"/>
           <p:cNvPicPr>
             <a:picLocks noChangeAspect="1"/>
           </p:cNvPicPr>
           <p:nvPr/>
         </p:nvPicPr>
         <p:blipFill>
-          <a:blip r:embed="rId8"/>
+          <a:blip r:embed="rId10"/>
           <a:stretch>
             <a:fillRect/>
           </a:stretch>
@@ -2938,7 +2811,7 @@
           <a:bodyPr wrap="square" lIns="0" tIns="0" rIns="0" bIns="0" rtlCol="0" anchor="ctr"/>
           <a:lstStyle/>
           <a:p>
-            <a:pPr indent="0" marL="0">
+            <a:pPr marL="0" indent="0">
               <a:buNone/>
             </a:pPr>
             <a:r>
@@ -2977,7 +2850,7 @@
           <a:bodyPr wrap="square" lIns="0" tIns="0" rIns="0" bIns="0" rtlCol="0" anchor="ctr"/>
           <a:lstStyle/>
           <a:p>
-            <a:pPr indent="0" marL="0">
+            <a:pPr marL="0" indent="0">
               <a:buNone/>
             </a:pPr>
             <a:r>
@@ -3016,7 +2889,7 @@
           <a:bodyPr wrap="square" lIns="0" tIns="0" rIns="0" bIns="0" rtlCol="0" anchor="ctr"/>
           <a:lstStyle/>
           <a:p>
-            <a:pPr algn="ctr" indent="0" marL="0">
+            <a:pPr marL="0" indent="0" algn="ctr">
               <a:buNone/>
             </a:pPr>
             <a:r>
@@ -3055,24 +2928,31 @@
             <a:prstDash val="solid"/>
           </a:ln>
           <a:effectLst>
-            <a:outerShdw sx="100000" sy="100000" kx="0" ky="0" algn="bl" rotWithShape="0" blurRad="76200" dist="25400" dir="8100000">
+            <a:outerShdw blurRad="76200" dist="25400" dir="8100000" algn="bl" rotWithShape="0">
               <a:srgbClr val="000000">
                 <a:alpha val="15000"/>
               </a:srgbClr>
             </a:outerShdw>
           </a:effectLst>
         </p:spPr>
+        <p:txBody>
+          <a:bodyPr/>
+          <a:lstStyle/>
+          <a:p>
+            <a:endParaRPr lang="en-US"/>
+          </a:p>
+        </p:txBody>
       </p:sp>
       <p:pic>
         <p:nvPicPr>
-          <p:cNvPr id="50" name="Image 8" descr="preencoded.png">    </p:cNvPr>
+          <p:cNvPr id="50" name="Image 8" descr="preencoded.png"/>
           <p:cNvPicPr>
             <a:picLocks noChangeAspect="1"/>
           </p:cNvPicPr>
           <p:nvPr/>
         </p:nvPicPr>
         <p:blipFill>
-          <a:blip r:embed="rId9"/>
+          <a:blip r:embed="rId11"/>
           <a:stretch>
             <a:fillRect/>
           </a:stretch>
@@ -3108,7 +2988,7 @@
           <a:bodyPr wrap="square" lIns="0" tIns="0" rIns="0" bIns="0" rtlCol="0" anchor="ctr"/>
           <a:lstStyle/>
           <a:p>
-            <a:pPr indent="0" marL="0">
+            <a:pPr marL="0" indent="0">
               <a:buNone/>
             </a:pPr>
             <a:r>
@@ -3147,7 +3027,7 @@
           <a:bodyPr wrap="square" lIns="0" tIns="0" rIns="0" bIns="0" rtlCol="0" anchor="ctr"/>
           <a:lstStyle/>
           <a:p>
-            <a:pPr indent="0" marL="0">
+            <a:pPr marL="0" indent="0">
               <a:buNone/>
             </a:pPr>
             <a:r>
@@ -3173,7 +3053,7 @@
         </p:nvSpPr>
         <p:spPr>
           <a:xfrm>
-            <a:off x="5669280" y="4434840"/>
+            <a:off x="5669280" y="4413820"/>
             <a:ext cx="274320" cy="274320"/>
           </a:xfrm>
           <a:prstGeom prst="rect">
@@ -3186,7 +3066,7 @@
           <a:bodyPr wrap="square" lIns="0" tIns="0" rIns="0" bIns="0" rtlCol="0" anchor="ctr"/>
           <a:lstStyle/>
           <a:p>
-            <a:pPr algn="ctr" indent="0" marL="0">
+            <a:pPr marL="0" indent="0" algn="ctr">
               <a:buNone/>
             </a:pPr>
             <a:r>
@@ -3209,7 +3089,7 @@
         </p:nvSpPr>
         <p:spPr>
           <a:xfrm>
-            <a:off x="7909560" y="4434840"/>
+            <a:off x="7909560" y="4413820"/>
             <a:ext cx="274320" cy="274320"/>
           </a:xfrm>
           <a:prstGeom prst="rect">
@@ -3222,7 +3102,7 @@
           <a:bodyPr wrap="square" lIns="0" tIns="0" rIns="0" bIns="0" rtlCol="0" anchor="ctr"/>
           <a:lstStyle/>
           <a:p>
-            <a:pPr algn="ctr" indent="0" marL="0">
+            <a:pPr marL="0" indent="0" algn="ctr">
               <a:buNone/>
             </a:pPr>
             <a:r>
@@ -3261,24 +3141,31 @@
             <a:prstDash val="solid"/>
           </a:ln>
           <a:effectLst>
-            <a:outerShdw sx="100000" sy="100000" kx="0" ky="0" algn="bl" rotWithShape="0" blurRad="76200" dist="25400" dir="8100000">
+            <a:outerShdw blurRad="76200" dist="25400" dir="8100000" algn="bl" rotWithShape="0">
               <a:srgbClr val="000000">
                 <a:alpha val="15000"/>
               </a:srgbClr>
             </a:outerShdw>
           </a:effectLst>
         </p:spPr>
+        <p:txBody>
+          <a:bodyPr/>
+          <a:lstStyle/>
+          <a:p>
+            <a:endParaRPr lang="en-US"/>
+          </a:p>
+        </p:txBody>
       </p:sp>
       <p:pic>
         <p:nvPicPr>
-          <p:cNvPr id="56" name="Image 9" descr="preencoded.png">    </p:cNvPr>
+          <p:cNvPr id="56" name="Image 9" descr="preencoded.png"/>
           <p:cNvPicPr>
             <a:picLocks noChangeAspect="1"/>
           </p:cNvPicPr>
           <p:nvPr/>
         </p:nvPicPr>
         <p:blipFill>
-          <a:blip r:embed="rId10"/>
+          <a:blip r:embed="rId12"/>
           <a:stretch>
             <a:fillRect/>
           </a:stretch>
@@ -3314,7 +3201,7 @@
           <a:bodyPr wrap="square" lIns="0" tIns="0" rIns="0" bIns="0" rtlCol="0" anchor="ctr"/>
           <a:lstStyle/>
           <a:p>
-            <a:pPr indent="0" marL="0">
+            <a:pPr marL="0" indent="0">
               <a:buNone/>
             </a:pPr>
             <a:r>
@@ -3353,7 +3240,7 @@
           <a:bodyPr wrap="square" lIns="0" tIns="0" rIns="0" bIns="0" rtlCol="0" anchor="ctr"/>
           <a:lstStyle/>
           <a:p>
-            <a:pPr indent="0" marL="0">
+            <a:pPr marL="0" indent="0">
               <a:buNone/>
             </a:pPr>
             <a:r>
@@ -3395,17 +3282,24 @@
             <a:prstDash val="solid"/>
           </a:ln>
         </p:spPr>
+        <p:txBody>
+          <a:bodyPr/>
+          <a:lstStyle/>
+          <a:p>
+            <a:endParaRPr lang="en-US"/>
+          </a:p>
+        </p:txBody>
       </p:sp>
       <p:pic>
         <p:nvPicPr>
-          <p:cNvPr id="60" name="Image 10" descr="preencoded.png">    </p:cNvPr>
+          <p:cNvPr id="60" name="Image 10" descr="preencoded.png"/>
           <p:cNvPicPr>
             <a:picLocks noChangeAspect="1"/>
           </p:cNvPicPr>
           <p:nvPr/>
         </p:nvPicPr>
         <p:blipFill>
-          <a:blip r:embed="rId11"/>
+          <a:blip r:embed="rId13"/>
           <a:stretch>
             <a:fillRect/>
           </a:stretch>
@@ -3441,7 +3335,7 @@
           <a:bodyPr wrap="square" lIns="0" tIns="0" rIns="0" bIns="0" rtlCol="0" anchor="ctr"/>
           <a:lstStyle/>
           <a:p>
-            <a:pPr indent="0" marL="0">
+            <a:pPr marL="0" indent="0">
               <a:buNone/>
             </a:pPr>
             <a:r>
@@ -3480,7 +3374,7 @@
           <a:bodyPr wrap="square" lIns="0" tIns="0" rIns="0" bIns="0" rtlCol="0" anchor="ctr"/>
           <a:lstStyle/>
           <a:p>
-            <a:pPr indent="0" marL="0">
+            <a:pPr marL="0" indent="0">
               <a:buNone/>
             </a:pPr>
             <a:r>
@@ -3506,7 +3400,7 @@
         </p:nvSpPr>
         <p:spPr>
           <a:xfrm>
-            <a:off x="457200" y="6126480"/>
+            <a:off x="457200" y="5832191"/>
             <a:ext cx="11247120" cy="365760"/>
           </a:xfrm>
           <a:prstGeom prst="rect">
@@ -3519,13 +3413,13 @@
           <a:bodyPr wrap="square" lIns="0" tIns="0" rIns="0" bIns="0" rtlCol="0" anchor="ctr"/>
           <a:lstStyle/>
           <a:p>
-            <a:pPr algn="ctr" indent="0" marL="0">
-              <a:buNone/>
-            </a:pPr>
-            <a:r>
-              <a:rPr lang="en-US" sz="900" i="1" dirty="0">
-                <a:solidFill>
-                  <a:srgbClr val="475569"/>
+            <a:pPr marL="0" indent="0" algn="ctr">
+              <a:buNone/>
+            </a:pPr>
+            <a:r>
+              <a:rPr lang="en-US" sz="2400" b="1" dirty="0">
+                <a:solidFill>
+                  <a:schemeClr val="bg1"/>
                 </a:solidFill>
                 <a:latin typeface="Calibri" pitchFamily="34" charset="0"/>
                 <a:ea typeface="Calibri" pitchFamily="34" charset="-122"/>
@@ -3533,7 +3427,52 @@
               </a:rPr>
               <a:t>Each step enriches the next. Conversations produce structured data. C2A quantifies it. Narratives humanize it. Career output operationalizes it.</a:t>
             </a:r>
-            <a:endParaRPr lang="en-US" sz="900" dirty="0"/>
+            <a:endParaRPr lang="en-US" sz="2400" b="1" dirty="0">
+              <a:solidFill>
+                <a:schemeClr val="bg1"/>
+              </a:solidFill>
+            </a:endParaRPr>
+          </a:p>
+        </p:txBody>
+      </p:sp>
+      <p:sp>
+        <p:nvSpPr>
+          <p:cNvPr id="64" name="Text 42">
+            <a:extLst>
+              <a:ext uri="{FF2B5EF4-FFF2-40B4-BE49-F238E27FC236}">
+                <a16:creationId xmlns:a16="http://schemas.microsoft.com/office/drawing/2014/main" id="{910C1E54-53A5-8584-F884-E7C0218E15A1}"/>
+              </a:ext>
+            </a:extLst>
+          </p:cNvPr>
+          <p:cNvSpPr/>
+          <p:nvPr/>
+        </p:nvSpPr>
+        <p:spPr>
+          <a:xfrm>
+            <a:off x="3414813" y="4408567"/>
+            <a:ext cx="274321" cy="274320"/>
+          </a:xfrm>
+          <a:prstGeom prst="rect">
+            <a:avLst/>
+          </a:prstGeom>
+          <a:noFill/>
+          <a:ln/>
+        </p:spPr>
+        <p:txBody>
+          <a:bodyPr wrap="square" lIns="0" tIns="0" rIns="0" bIns="0" rtlCol="0" anchor="ctr"/>
+          <a:lstStyle/>
+          <a:p>
+            <a:pPr marL="0" indent="0" algn="ctr">
+              <a:buNone/>
+            </a:pPr>
+            <a:r>
+              <a:rPr lang="en-US" sz="1400" dirty="0">
+                <a:solidFill>
+                  <a:srgbClr val="00B050"/>
+                </a:solidFill>
+              </a:rPr>
+              <a:t>↓</a:t>
+            </a:r>
           </a:p>
         </p:txBody>
       </p:sp>
@@ -3838,4 +3777,319 @@
     </a:ext>
   </a:extLst>
 </a:theme>
+</file>
+
+<file path=ppt/theme/theme2.xml><?xml version="1.0" encoding="utf-8"?>
+<a:theme xmlns:a="http://schemas.openxmlformats.org/drawingml/2006/main" name="Office Theme">
+  <a:themeElements>
+    <a:clrScheme name="Office">
+      <a:dk1>
+        <a:sysClr val="windowText" lastClr="000000"/>
+      </a:dk1>
+      <a:lt1>
+        <a:sysClr val="window" lastClr="FFFFFF"/>
+      </a:lt1>
+      <a:dk2>
+        <a:srgbClr val="0E2841"/>
+      </a:dk2>
+      <a:lt2>
+        <a:srgbClr val="E8E8E8"/>
+      </a:lt2>
+      <a:accent1>
+        <a:srgbClr val="156082"/>
+      </a:accent1>
+      <a:accent2>
+        <a:srgbClr val="E97132"/>
+      </a:accent2>
+      <a:accent3>
+        <a:srgbClr val="196B24"/>
+      </a:accent3>
+      <a:accent4>
+        <a:srgbClr val="0F9ED5"/>
+      </a:accent4>
+      <a:accent5>
+        <a:srgbClr val="A02B93"/>
+      </a:accent5>
+      <a:accent6>
+        <a:srgbClr val="4EA72E"/>
+      </a:accent6>
+      <a:hlink>
+        <a:srgbClr val="467886"/>
+      </a:hlink>
+      <a:folHlink>
+        <a:srgbClr val="96607D"/>
+      </a:folHlink>
+    </a:clrScheme>
+    <a:fontScheme name="Office">
+      <a:majorFont>
+        <a:latin typeface="Aptos Display" panose="02110004020202020204"/>
+        <a:ea typeface=""/>
+        <a:cs typeface=""/>
+        <a:font script="Jpan" typeface="游ゴシック Light"/>
+        <a:font script="Hang" typeface="맑은 고딕"/>
+        <a:font script="Hans" typeface="等线 Light"/>
+        <a:font script="Hant" typeface="新細明體"/>
+        <a:font script="Arab" typeface="Times New Roman"/>
+        <a:font script="Hebr" typeface="Times New Roman"/>
+        <a:font script="Thai" typeface="Angsana New"/>
+        <a:font script="Ethi" typeface="Nyala"/>
+        <a:font script="Beng" typeface="Vrinda"/>
+        <a:font script="Gujr" typeface="Shruti"/>
+        <a:font script="Khmr" typeface="MoolBoran"/>
+        <a:font script="Knda" typeface="Tunga"/>
+        <a:font script="Guru" typeface="Raavi"/>
+        <a:font script="Cans" typeface="Euphemia"/>
+        <a:font script="Cher" typeface="Plantagenet Cherokee"/>
+        <a:font script="Yiii" typeface="Microsoft Yi Baiti"/>
+        <a:font script="Tibt" typeface="Microsoft Himalaya"/>
+        <a:font script="Thaa" typeface="MV Boli"/>
+        <a:font script="Deva" typeface="Mangal"/>
+        <a:font script="Telu" typeface="Gautami"/>
+        <a:font script="Taml" typeface="Latha"/>
+        <a:font script="Syrc" typeface="Estrangelo Edessa"/>
+        <a:font script="Orya" typeface="Kalinga"/>
+        <a:font script="Mlym" typeface="Kartika"/>
+        <a:font script="Laoo" typeface="DokChampa"/>
+        <a:font script="Sinh" typeface="Iskoola Pota"/>
+        <a:font script="Mong" typeface="Mongolian Baiti"/>
+        <a:font script="Viet" typeface="Times New Roman"/>
+        <a:font script="Uigh" typeface="Microsoft Uighur"/>
+        <a:font script="Geor" typeface="Sylfaen"/>
+        <a:font script="Armn" typeface="Arial"/>
+        <a:font script="Bugi" typeface="Leelawadee UI"/>
+        <a:font script="Bopo" typeface="Microsoft JhengHei"/>
+        <a:font script="Java" typeface="Javanese Text"/>
+        <a:font script="Lisu" typeface="Segoe UI"/>
+        <a:font script="Mymr" typeface="Myanmar Text"/>
+        <a:font script="Nkoo" typeface="Ebrima"/>
+        <a:font script="Olck" typeface="Nirmala UI"/>
+        <a:font script="Osma" typeface="Ebrima"/>
+        <a:font script="Phag" typeface="Phagspa"/>
+        <a:font script="Syrn" typeface="Estrangelo Edessa"/>
+        <a:font script="Syrj" typeface="Estrangelo Edessa"/>
+        <a:font script="Syre" typeface="Estrangelo Edessa"/>
+        <a:font script="Sora" typeface="Nirmala UI"/>
+        <a:font script="Tale" typeface="Microsoft Tai Le"/>
+        <a:font script="Talu" typeface="Microsoft New Tai Lue"/>
+        <a:font script="Tfng" typeface="Ebrima"/>
+      </a:majorFont>
+      <a:minorFont>
+        <a:latin typeface="Aptos" panose="02110004020202020204"/>
+        <a:ea typeface=""/>
+        <a:cs typeface=""/>
+        <a:font script="Jpan" typeface="游ゴシック"/>
+        <a:font script="Hang" typeface="맑은 고딕"/>
+        <a:font script="Hans" typeface="等线"/>
+        <a:font script="Hant" typeface="新細明體"/>
+        <a:font script="Arab" typeface="Arial"/>
+        <a:font script="Hebr" typeface="Arial"/>
+        <a:font script="Thai" typeface="Cordia New"/>
+        <a:font script="Ethi" typeface="Nyala"/>
+        <a:font script="Beng" typeface="Vrinda"/>
+        <a:font script="Gujr" typeface="Shruti"/>
+        <a:font script="Khmr" typeface="DaunPenh"/>
+        <a:font script="Knda" typeface="Tunga"/>
+        <a:font script="Guru" typeface="Raavi"/>
+        <a:font script="Cans" typeface="Euphemia"/>
+        <a:font script="Cher" typeface="Plantagenet Cherokee"/>
+        <a:font script="Yiii" typeface="Microsoft Yi Baiti"/>
+        <a:font script="Tibt" typeface="Microsoft Himalaya"/>
+        <a:font script="Thaa" typeface="MV Boli"/>
+        <a:font script="Deva" typeface="Mangal"/>
+        <a:font script="Telu" typeface="Gautami"/>
+        <a:font script="Taml" typeface="Latha"/>
+        <a:font script="Syrc" typeface="Estrangelo Edessa"/>
+        <a:font script="Orya" typeface="Kalinga"/>
+        <a:font script="Mlym" typeface="Kartika"/>
+        <a:font script="Laoo" typeface="DokChampa"/>
+        <a:font script="Sinh" typeface="Iskoola Pota"/>
+        <a:font script="Mong" typeface="Mongolian Baiti"/>
+        <a:font script="Viet" typeface="Arial"/>
+        <a:font script="Uigh" typeface="Microsoft Uighur"/>
+        <a:font script="Geor" typeface="Sylfaen"/>
+        <a:font script="Armn" typeface="Arial"/>
+        <a:font script="Bugi" typeface="Leelawadee UI"/>
+        <a:font script="Bopo" typeface="Microsoft JhengHei"/>
+        <a:font script="Java" typeface="Javanese Text"/>
+        <a:font script="Lisu" typeface="Segoe UI"/>
+        <a:font script="Mymr" typeface="Myanmar Text"/>
+        <a:font script="Nkoo" typeface="Ebrima"/>
+        <a:font script="Olck" typeface="Nirmala UI"/>
+        <a:font script="Osma" typeface="Ebrima"/>
+        <a:font script="Phag" typeface="Phagspa"/>
+        <a:font script="Syrn" typeface="Estrangelo Edessa"/>
+        <a:font script="Syrj" typeface="Estrangelo Edessa"/>
+        <a:font script="Syre" typeface="Estrangelo Edessa"/>
+        <a:font script="Sora" typeface="Nirmala UI"/>
+        <a:font script="Tale" typeface="Microsoft Tai Le"/>
+        <a:font script="Talu" typeface="Microsoft New Tai Lue"/>
+        <a:font script="Tfng" typeface="Ebrima"/>
+      </a:minorFont>
+    </a:fontScheme>
+    <a:fmtScheme name="Office">
+      <a:fillStyleLst>
+        <a:solidFill>
+          <a:schemeClr val="phClr"/>
+        </a:solidFill>
+        <a:gradFill rotWithShape="1">
+          <a:gsLst>
+            <a:gs pos="0">
+              <a:schemeClr val="phClr">
+                <a:lumMod val="110000"/>
+                <a:satMod val="105000"/>
+                <a:tint val="67000"/>
+              </a:schemeClr>
+            </a:gs>
+            <a:gs pos="50000">
+              <a:schemeClr val="phClr">
+                <a:lumMod val="105000"/>
+                <a:satMod val="103000"/>
+                <a:tint val="73000"/>
+              </a:schemeClr>
+            </a:gs>
+            <a:gs pos="100000">
+              <a:schemeClr val="phClr">
+                <a:lumMod val="105000"/>
+                <a:satMod val="109000"/>
+                <a:tint val="81000"/>
+              </a:schemeClr>
+            </a:gs>
+          </a:gsLst>
+          <a:lin ang="5400000" scaled="0"/>
+        </a:gradFill>
+        <a:gradFill rotWithShape="1">
+          <a:gsLst>
+            <a:gs pos="0">
+              <a:schemeClr val="phClr">
+                <a:satMod val="103000"/>
+                <a:lumMod val="102000"/>
+                <a:tint val="94000"/>
+              </a:schemeClr>
+            </a:gs>
+            <a:gs pos="50000">
+              <a:schemeClr val="phClr">
+                <a:satMod val="110000"/>
+                <a:lumMod val="100000"/>
+                <a:shade val="100000"/>
+              </a:schemeClr>
+            </a:gs>
+            <a:gs pos="100000">
+              <a:schemeClr val="phClr">
+                <a:lumMod val="99000"/>
+                <a:satMod val="120000"/>
+                <a:shade val="78000"/>
+              </a:schemeClr>
+            </a:gs>
+          </a:gsLst>
+          <a:lin ang="5400000" scaled="0"/>
+        </a:gradFill>
+      </a:fillStyleLst>
+      <a:lnStyleLst>
+        <a:ln w="12700" cap="flat" cmpd="sng" algn="ctr">
+          <a:solidFill>
+            <a:schemeClr val="phClr"/>
+          </a:solidFill>
+          <a:prstDash val="solid"/>
+          <a:miter lim="800000"/>
+        </a:ln>
+        <a:ln w="19050" cap="flat" cmpd="sng" algn="ctr">
+          <a:solidFill>
+            <a:schemeClr val="phClr"/>
+          </a:solidFill>
+          <a:prstDash val="solid"/>
+          <a:miter lim="800000"/>
+        </a:ln>
+        <a:ln w="25400" cap="flat" cmpd="sng" algn="ctr">
+          <a:solidFill>
+            <a:schemeClr val="phClr"/>
+          </a:solidFill>
+          <a:prstDash val="solid"/>
+          <a:miter lim="800000"/>
+        </a:ln>
+      </a:lnStyleLst>
+      <a:effectStyleLst>
+        <a:effectStyle>
+          <a:effectLst/>
+        </a:effectStyle>
+        <a:effectStyle>
+          <a:effectLst/>
+        </a:effectStyle>
+        <a:effectStyle>
+          <a:effectLst>
+            <a:outerShdw blurRad="57150" dist="19050" dir="5400000" algn="ctr" rotWithShape="0">
+              <a:srgbClr val="000000">
+                <a:alpha val="63000"/>
+              </a:srgbClr>
+            </a:outerShdw>
+          </a:effectLst>
+        </a:effectStyle>
+      </a:effectStyleLst>
+      <a:bgFillStyleLst>
+        <a:solidFill>
+          <a:schemeClr val="phClr"/>
+        </a:solidFill>
+        <a:solidFill>
+          <a:schemeClr val="phClr">
+            <a:tint val="95000"/>
+            <a:satMod val="170000"/>
+          </a:schemeClr>
+        </a:solidFill>
+        <a:gradFill rotWithShape="1">
+          <a:gsLst>
+            <a:gs pos="0">
+              <a:schemeClr val="phClr">
+                <a:tint val="93000"/>
+                <a:satMod val="150000"/>
+                <a:shade val="98000"/>
+                <a:lumMod val="102000"/>
+              </a:schemeClr>
+            </a:gs>
+            <a:gs pos="50000">
+              <a:schemeClr val="phClr">
+                <a:tint val="98000"/>
+                <a:satMod val="130000"/>
+                <a:shade val="90000"/>
+                <a:lumMod val="103000"/>
+              </a:schemeClr>
+            </a:gs>
+            <a:gs pos="100000">
+              <a:schemeClr val="phClr">
+                <a:shade val="63000"/>
+                <a:satMod val="120000"/>
+              </a:schemeClr>
+            </a:gs>
+          </a:gsLst>
+          <a:lin ang="5400000" scaled="0"/>
+        </a:gradFill>
+      </a:bgFillStyleLst>
+    </a:fmtScheme>
+  </a:themeElements>
+  <a:objectDefaults>
+    <a:lnDef>
+      <a:spPr/>
+      <a:bodyPr/>
+      <a:lstStyle/>
+      <a:style>
+        <a:lnRef idx="2">
+          <a:schemeClr val="accent1"/>
+        </a:lnRef>
+        <a:fillRef idx="0">
+          <a:schemeClr val="accent1"/>
+        </a:fillRef>
+        <a:effectRef idx="1">
+          <a:schemeClr val="accent1"/>
+        </a:effectRef>
+        <a:fontRef idx="minor">
+          <a:schemeClr val="tx1"/>
+        </a:fontRef>
+      </a:style>
+    </a:lnDef>
+  </a:objectDefaults>
+  <a:extraClrSchemeLst/>
+  <a:extLst>
+    <a:ext uri="{05A4C25C-085E-4340-85A3-A5531E510DB2}">
+      <thm15:themeFamily xmlns:thm15="http://schemas.microsoft.com/office/thememl/2012/main" name="Office Theme" id="{2E142A2C-CD16-42D6-873A-C26D2A0506FA}" vid="{1BDDFF52-6CD6-40A5-AB3C-68EB2F1E4D0A}"/>
+    </a:ext>
+  </a:extLst>
+</a:theme>
 </file>